--- a/submission/03_presentation.pptx
+++ b/submission/03_presentation.pptx
@@ -15140,7 +15140,7 @@
                           </a:solidFill>
                           <a:latin typeface="Calibri"/>
                         </a:rPr>
-                        <a:t>Informatics Engineering</a:t>
+                        <a:t>Information Systems</a:t>
                       </a:r>
                     </a:p>
                   </a:txBody>
